--- a/esp32-class-projects/02_sessions/slides/6회차_핵심기능_구현.pptx
+++ b/esp32-class-projects/02_sessions/slides/6회차_핵심기능_구현.pptx
@@ -9714,7 +9714,7 @@
                           <a:ea typeface="Pretendard" pitchFamily="34" charset="-122"/>
                           <a:cs typeface="Pretendard" pitchFamily="34" charset="-120"/>
                         </a:rPr>
-                        <a:t>LCD 'SOLD: cola' + LED 깜빡</a:t>
+                        <a:t>7세그 판매 수량 갱신 + LED 깜빡</a:t>
                       </a:r>
                       <a:endParaRPr lang="en-US" sz="1400" dirty="0">
                         <a:latin typeface="Pretendard" charset="0"/>
@@ -9988,7 +9988,7 @@
                           <a:ea typeface="Pretendard" pitchFamily="34" charset="-122"/>
                           <a:cs typeface="Pretendard" pitchFamily="34" charset="-120"/>
                         </a:rPr>
-                        <a:t>LCD에 주문번호 크게 표시</a:t>
+                        <a:t>7세그에 주문번호 표시</a:t>
                       </a:r>
                       <a:endParaRPr lang="en-US" sz="1400" dirty="0">
                         <a:latin typeface="Pretendard" charset="0"/>
@@ -10262,7 +10262,7 @@
                           <a:ea typeface="Pretendard" pitchFamily="34" charset="-122"/>
                           <a:cs typeface="Pretendard" pitchFamily="34" charset="-120"/>
                         </a:rPr>
-                        <a:t>무게 변화 확인 + LCD 안내</a:t>
+                        <a:t>무게 변화 확인 + 웹 안내</a:t>
                       </a:r>
                       <a:endParaRPr lang="en-US" sz="1400" dirty="0">
                         <a:latin typeface="Pretendard" charset="0"/>
@@ -10536,7 +10536,7 @@
                           <a:ea typeface="Pretendard" pitchFamily="34" charset="-122"/>
                           <a:cs typeface="Pretendard" pitchFamily="34" charset="-120"/>
                         </a:rPr>
-                        <a:t>LCD '급수 필요!' + 웹 경고</a:t>
+                        <a:t>웹 경고 + LED 점멸</a:t>
                       </a:r>
                       <a:endParaRPr lang="en-US" sz="1400" dirty="0">
                         <a:latin typeface="Pretendard" charset="0"/>
@@ -10810,7 +10810,7 @@
                           <a:ea typeface="Pretendard" pitchFamily="34" charset="-122"/>
                           <a:cs typeface="Pretendard" pitchFamily="34" charset="-120"/>
                         </a:rPr>
-                        <a:t>LCD 인원 갱신 + LED 깜빡</a:t>
+                        <a:t>7세그 인원 갱신 + LED 깜빡</a:t>
                       </a:r>
                       <a:endParaRPr lang="en-US" sz="1400" dirty="0">
                         <a:latin typeface="Pretendard" charset="0"/>
@@ -11581,7 +11581,7 @@
                 <a:ea typeface="Courier New" pitchFamily="34" charset="-122"/>
                 <a:cs typeface="Courier New" pitchFamily="34" charset="-120"/>
               </a:rPr>
-              <a:t>// → LCD 표시 + LED 깜빡 → A1 비움</a:t>
+              <a:t>// → 7세그 갱신 + LED 깜빡 → A1 비움</a:t>
             </a:r>
             <a:endParaRPr lang="en-US" sz="1400" dirty="0"/>
           </a:p>
@@ -12425,7 +12425,7 @@
                 <a:ea typeface="Pretendard" pitchFamily="34" charset="-122"/>
                 <a:cs typeface="Pretendard" pitchFamily="34" charset="-120"/>
               </a:rPr>
-              <a:t>장치 반응(LCD·LED)을 영상 촬영</a:t>
+              <a:t>장치 반응(7세그·LED)을 영상 촬영</a:t>
             </a:r>
             <a:endParaRPr lang="en-US" sz="1450" dirty="0"/>
           </a:p>
@@ -13464,7 +13464,7 @@
                 <a:ea typeface="Pretendard" pitchFamily="34" charset="-122"/>
                 <a:cs typeface="Pretendard" pitchFamily="34" charset="-120"/>
               </a:rPr>
-              <a:t>알림 설계 — 빛과 글자에도 '문법'이 있어요</a:t>
+              <a:t>알림 설계 — 빛과 숫자에도 '문법'이 있어요</a:t>
             </a:r>
             <a:endParaRPr lang="en-US" sz="2500" dirty="0"/>
           </a:p>
@@ -13706,7 +13706,7 @@
                 <a:ea typeface="Pretendard" pitchFamily="34" charset="-122"/>
                 <a:cs typeface="Pretendard" pitchFamily="34" charset="-120"/>
               </a:rPr>
-              <a:t>LED 짧게 2회 + LCD 'OK' 문구 — 판매 완료, 출석 완료, 반납 완료</a:t>
+              <a:t>LED 짧게 2회 + 7세그 값 갱신(판매 수량·주문번호·인원) — 판매·출석·반납 완료</a:t>
             </a:r>
             <a:endParaRPr lang="en-US" sz="1500" dirty="0"/>
           </a:p>
@@ -13848,7 +13848,7 @@
                 <a:ea typeface="Pretendard" pitchFamily="34" charset="-122"/>
                 <a:cs typeface="Pretendard" pitchFamily="34" charset="-120"/>
               </a:rPr>
-              <a:t>LED 빠른 연속 점멸 + LCD '!!' — 재고 부족, 수분 부족, 우산 없음</a:t>
+              <a:t>LED 빠른 연속 점멸 + 7세그 깜빡임 — 재고 부족, 수분 부족, 우산 없음</a:t>
             </a:r>
             <a:endParaRPr lang="en-US" sz="1500" dirty="0"/>
           </a:p>
@@ -13990,7 +13990,7 @@
                 <a:ea typeface="Pretendard" pitchFamily="34" charset="-122"/>
                 <a:cs typeface="Pretendard" pitchFamily="34" charset="-120"/>
               </a:rPr>
-              <a:t>LCD 1줄 = 상태 요약, 2줄 = 상세 (예: 'SOLD: cola / stock 6')</a:t>
+              <a:t>글자 안내는 웹 화면 담당 — 7세그는 숫자, 웹은 문장!</a:t>
             </a:r>
             <a:endParaRPr lang="en-US" sz="1500" dirty="0"/>
           </a:p>
